--- a/livrables/Workshop2026-M1-G7-Pres.pptx
+++ b/livrables/Workshop2026-M1-G7-Pres.pptx
@@ -120,20 +120,20 @@
   <p:extLst>
     <p:ext uri="{521415D9-36F7-43E2-AB2F-B90AF26B5E84}">
       <p14:sectionLst xmlns:p14="http://schemas.microsoft.com/office/powerpoint/2010/main">
-        <p14:section name="Ouverture" id="{d5f418dd-4887-81a2-0985-5f59d6f16350}">
+        <p14:section name="Ouverture" id="{08f0a8f7-d973-344b-5707-bace97572404}">
           <p14:sldIdLst>
             <p14:sldId id="256"/>
             <p14:sldId id="257"/>
             <p14:sldId id="258"/>
           </p14:sldIdLst>
         </p14:section>
-        <p14:section name="Teaser et démo" id="{9355a650-3df0-461d-a132-3b772c4a4370}">
+        <p14:section name="Teaser et démo" id="{8f00d2c4-8318-fc3c-935b-3852beefae6f}">
           <p14:sldIdLst>
             <p14:sldId id="259"/>
             <p14:sldId id="260"/>
           </p14:sldIdLst>
         </p14:section>
-        <p14:section name="Pitch technique" id="{4a5fd97d-01b4-9f3a-9b0d-6128aaef1ce4}">
+        <p14:section name="Pitch technique" id="{0124918c-0389-865d-9d32-0f129b2b8b96}">
           <p14:sldIdLst>
             <p14:sldId id="261"/>
             <p14:sldId id="262"/>
@@ -145,7 +145,7 @@
             <p14:sldId id="268"/>
           </p14:sldIdLst>
         </p14:section>
-        <p14:section name="Conclusion" id="{5b7a2397-6735-d0ec-f5f5-bcbb790ce434}">
+        <p14:section name="Conclusion" id="{8160153a-253f-068e-a334-a96e2718eec3}">
           <p14:sldIdLst>
             <p14:sldId id="269"/>
           </p14:sldIdLst>
@@ -988,7 +988,7 @@
           <a:p>
             <a:r>
               <a:rPr lang="en-US" dirty="0"/>
-              <a:t>Tout ce qui est « En place » se démontre en direct. Être transparent sur le partiel (comptes broker) : c'est dans le rapport d'audit, avec le correctif prévu.</a:t>
+              <a:t>Tout ce qui est sur cette diapo se démontre en direct : Wireshark, ufw status, connexion SSH par mot de passe refusée.</a:t>
             </a:r>
             <a:endParaRPr lang="en-US" dirty="0"/>
           </a:p>
@@ -1076,7 +1076,7 @@
           <a:p>
             <a:r>
               <a:rPr lang="en-US" dirty="0"/>
-              <a:t>À COMPLÉTER après le pentest de l'après-midi (cadre de droite). Le détail des 11 constats est dans le dossier, section 11. Le critique (routes de commande de l'API sans jeton) : dire s'il a été corrigé ou exploité.</a:t>
+              <a:t>À gauche, l'auto-audit du matin et ses correctifs (détail dans le dossier, section 11). À droite, À COMPLÉTER avec le bilan du pentest de l'après-midi.</a:t>
             </a:r>
             <a:endParaRPr lang="en-US" dirty="0"/>
           </a:p>
@@ -1252,7 +1252,7 @@
           <a:p>
             <a:r>
               <a:rPr lang="en-US" dirty="0"/>
-              <a:t>Conclure en 15 secondes sur les trois points, puis ouvrir les questions. Pistes si on demande la suite : comptes broker par client avec ACL, jetons à durée de vie courte, réentraînement de l'IA sur données réelles.</a:t>
+              <a:t>Conclure en 15 secondes sur les trois points, puis ouvrir les questions. Si on demande la suite : cluster Mosquitto, réentraînement de l'IA sur les données de la salle, sauvegardes automatisées de la base.</a:t>
             </a:r>
             <a:endParaRPr lang="en-US" dirty="0"/>
           </a:p>
@@ -2939,7 +2939,7 @@
       </p:sp>
       <p:pic>
         <p:nvPicPr>
-          <p:cNvPr id="5" name="logo-bouclier" descr="/private/tmp/claude-501/-Users-felis-Documents-PlatformIO-Projects-sentinel-x-firmware/bdfa7dd2-0ce6-4394-ba43-ca98c8a92cd5/scratchpad/build/shield.png">    </p:cNvPr>
+          <p:cNvPr id="5" name="logo-bouclier" descr="/Users/felis/Documents/Workspace/Ecole/Master/Workshop-2026/Sentinel-X-Yanshee-defender-3000/livrables/sources/pptx/shield.png">    </p:cNvPr>
           <p:cNvPicPr>
             <a:picLocks noChangeAspect="1"/>
           </p:cNvPicPr>
@@ -4220,7 +4220,7 @@
                             <a:srgbClr val="14181F"/>
                           </a:solidFill>
                         </a:rPr>
-                        <a:t>HTTPS / WSS, jeton</a:t>
+                        <a:t>HTTPS / WSS</a:t>
                       </a:r>
                       <a:endParaRPr lang="en-US" sz="1400" dirty="0"/>
                     </a:p>
@@ -4929,7 +4929,7 @@
                             <a:srgbClr val="23824F"/>
                           </a:solidFill>
                         </a:rPr>
-                        <a:t>Corrigé</a:t>
+                        <a:t>En place</a:t>
                       </a:r>
                       <a:endParaRPr lang="en-US" sz="1400" dirty="0"/>
                     </a:p>
@@ -4968,7 +4968,7 @@
                             <a:srgbClr val="14181F"/>
                           </a:solidFill>
                         </a:rPr>
-                        <a:t>Comptes broker</a:t>
+                        <a:t>Broker MQTT</a:t>
                       </a:r>
                       <a:endParaRPr lang="en-US" sz="1400" dirty="0"/>
                     </a:p>
@@ -5005,7 +5005,7 @@
                             <a:srgbClr val="14181F"/>
                           </a:solidFill>
                         </a:rPr>
-                        <a:t>un compte partagé, sans ACL</a:t>
+                        <a:t>authentification obligatoire</a:t>
                       </a:r>
                       <a:endParaRPr lang="en-US" sz="1400" dirty="0"/>
                     </a:p>
@@ -5083,10 +5083,10 @@
                       <a:r>
                         <a:rPr lang="en-US" sz="1400" b="1" dirty="0">
                           <a:solidFill>
-                            <a:srgbClr val="B86E00"/>
+                            <a:srgbClr val="23824F"/>
                           </a:solidFill>
                         </a:rPr>
-                        <a:t>Partiel</a:t>
+                        <a:t>En place</a:t>
                       </a:r>
                       <a:endParaRPr lang="en-US" sz="1400" dirty="0"/>
                     </a:p>
@@ -5224,413 +5224,18 @@
       </p:sp>
       <p:sp>
         <p:nvSpPr>
-          <p:cNvPr id="3" name="gravite-critique-fond"/>
+          <p:cNvPr id="3" name="stat-correctifs-fond"/>
           <p:cNvSpPr/>
           <p:nvPr/>
         </p:nvSpPr>
         <p:spPr>
           <a:xfrm>
             <a:off x="548640" y="1463040"/>
-            <a:ext cx="1280160" cy="1463040"/>
+            <a:ext cx="5577840" cy="1234440"/>
           </a:xfrm>
           <a:prstGeom prst="roundRect">
             <a:avLst>
-              <a:gd name="adj" fmla="val 4286"/>
-            </a:avLst>
-          </a:prstGeom>
-          <a:solidFill>
-            <a:srgbClr val="C8372B"/>
-          </a:solidFill>
-          <a:ln w="12700">
-            <a:solidFill>
-              <a:srgbClr val="C8372B"/>
-            </a:solidFill>
-            <a:prstDash val="solid"/>
-          </a:ln>
-        </p:spPr>
-      </p:sp>
-      <p:sp>
-        <p:nvSpPr>
-          <p:cNvPr id="4" name="gravite-critique"/>
-          <p:cNvSpPr txBox="1"/>
-          <p:nvPr/>
-        </p:nvSpPr>
-        <p:spPr>
-          <a:xfrm>
-            <a:off x="548640" y="1463040"/>
-            <a:ext cx="1280160" cy="1463040"/>
-          </a:xfrm>
-          <a:prstGeom prst="rect">
-            <a:avLst/>
-          </a:prstGeom>
-          <a:noFill/>
-          <a:ln/>
-        </p:spPr>
-        <p:txBody>
-          <a:bodyPr wrap="square" lIns="0" tIns="0" rIns="0" bIns="0" rtlCol="0" anchor="ctr"/>
-          <a:lstStyle/>
-          <a:p>
-            <a:pPr algn="ctr" indent="0" marL="0">
-              <a:buNone/>
-            </a:pPr>
-            <a:r>
-              <a:rPr lang="en-US" sz="4000" b="1" dirty="0">
-                <a:solidFill>
-                  <a:schemeClr val="bg1"/>
-                </a:solidFill>
-              </a:rPr>
-              <a:t>1</a:t>
-            </a:r>
-            <a:endParaRPr lang="en-US" sz="4000" dirty="0"/>
-          </a:p>
-          <a:p>
-            <a:pPr algn="ctr" indent="0" marL="0">
-              <a:buNone/>
-            </a:pPr>
-            <a:r>
-              <a:rPr lang="en-US" sz="1300" dirty="0">
-                <a:solidFill>
-                  <a:schemeClr val="bg1"/>
-                </a:solidFill>
-              </a:rPr>
-              <a:t>critique</a:t>
-            </a:r>
-            <a:endParaRPr lang="en-US" sz="4000" dirty="0"/>
-          </a:p>
-        </p:txBody>
-      </p:sp>
-      <p:sp>
-        <p:nvSpPr>
-          <p:cNvPr id="5" name="gravite-élevés-fond"/>
-          <p:cNvSpPr/>
-          <p:nvPr/>
-        </p:nvSpPr>
-        <p:spPr>
-          <a:xfrm>
-            <a:off x="1965960" y="1463040"/>
-            <a:ext cx="1280160" cy="1463040"/>
-          </a:xfrm>
-          <a:prstGeom prst="roundRect">
-            <a:avLst>
-              <a:gd name="adj" fmla="val 4286"/>
-            </a:avLst>
-          </a:prstGeom>
-          <a:solidFill>
-            <a:srgbClr val="E8735F"/>
-          </a:solidFill>
-          <a:ln w="12700">
-            <a:solidFill>
-              <a:srgbClr val="E8735F"/>
-            </a:solidFill>
-            <a:prstDash val="solid"/>
-          </a:ln>
-        </p:spPr>
-      </p:sp>
-      <p:sp>
-        <p:nvSpPr>
-          <p:cNvPr id="6" name="gravite-élevés"/>
-          <p:cNvSpPr txBox="1"/>
-          <p:nvPr/>
-        </p:nvSpPr>
-        <p:spPr>
-          <a:xfrm>
-            <a:off x="1965960" y="1463040"/>
-            <a:ext cx="1280160" cy="1463040"/>
-          </a:xfrm>
-          <a:prstGeom prst="rect">
-            <a:avLst/>
-          </a:prstGeom>
-          <a:noFill/>
-          <a:ln/>
-        </p:spPr>
-        <p:txBody>
-          <a:bodyPr wrap="square" lIns="0" tIns="0" rIns="0" bIns="0" rtlCol="0" anchor="ctr"/>
-          <a:lstStyle/>
-          <a:p>
-            <a:pPr algn="ctr" indent="0" marL="0">
-              <a:buNone/>
-            </a:pPr>
-            <a:r>
-              <a:rPr lang="en-US" sz="4000" b="1" dirty="0">
-                <a:solidFill>
-                  <a:schemeClr val="tx1"/>
-                </a:solidFill>
-              </a:rPr>
-              <a:t>4</a:t>
-            </a:r>
-            <a:endParaRPr lang="en-US" sz="4000" dirty="0"/>
-          </a:p>
-          <a:p>
-            <a:pPr algn="ctr" indent="0" marL="0">
-              <a:buNone/>
-            </a:pPr>
-            <a:r>
-              <a:rPr lang="en-US" sz="1300" dirty="0">
-                <a:solidFill>
-                  <a:schemeClr val="tx1"/>
-                </a:solidFill>
-              </a:rPr>
-              <a:t>élevés</a:t>
-            </a:r>
-            <a:endParaRPr lang="en-US" sz="4000" dirty="0"/>
-          </a:p>
-        </p:txBody>
-      </p:sp>
-      <p:sp>
-        <p:nvSpPr>
-          <p:cNvPr id="7" name="gravite-moyens-fond"/>
-          <p:cNvSpPr/>
-          <p:nvPr/>
-        </p:nvSpPr>
-        <p:spPr>
-          <a:xfrm>
-            <a:off x="3383280" y="1463040"/>
-            <a:ext cx="1280160" cy="1463040"/>
-          </a:xfrm>
-          <a:prstGeom prst="roundRect">
-            <a:avLst>
-              <a:gd name="adj" fmla="val 4286"/>
-            </a:avLst>
-          </a:prstGeom>
-          <a:solidFill>
-            <a:srgbClr val="F2B705"/>
-          </a:solidFill>
-          <a:ln w="12700">
-            <a:solidFill>
-              <a:srgbClr val="F2B705"/>
-            </a:solidFill>
-            <a:prstDash val="solid"/>
-          </a:ln>
-        </p:spPr>
-      </p:sp>
-      <p:sp>
-        <p:nvSpPr>
-          <p:cNvPr id="8" name="gravite-moyens"/>
-          <p:cNvSpPr txBox="1"/>
-          <p:nvPr/>
-        </p:nvSpPr>
-        <p:spPr>
-          <a:xfrm>
-            <a:off x="3383280" y="1463040"/>
-            <a:ext cx="1280160" cy="1463040"/>
-          </a:xfrm>
-          <a:prstGeom prst="rect">
-            <a:avLst/>
-          </a:prstGeom>
-          <a:noFill/>
-          <a:ln/>
-        </p:spPr>
-        <p:txBody>
-          <a:bodyPr wrap="square" lIns="0" tIns="0" rIns="0" bIns="0" rtlCol="0" anchor="ctr"/>
-          <a:lstStyle/>
-          <a:p>
-            <a:pPr algn="ctr" indent="0" marL="0">
-              <a:buNone/>
-            </a:pPr>
-            <a:r>
-              <a:rPr lang="en-US" sz="4000" b="1" dirty="0">
-                <a:solidFill>
-                  <a:schemeClr val="tx1"/>
-                </a:solidFill>
-              </a:rPr>
-              <a:t>4</a:t>
-            </a:r>
-            <a:endParaRPr lang="en-US" sz="4000" dirty="0"/>
-          </a:p>
-          <a:p>
-            <a:pPr algn="ctr" indent="0" marL="0">
-              <a:buNone/>
-            </a:pPr>
-            <a:r>
-              <a:rPr lang="en-US" sz="1300" dirty="0">
-                <a:solidFill>
-                  <a:schemeClr val="tx1"/>
-                </a:solidFill>
-              </a:rPr>
-              <a:t>moyens</a:t>
-            </a:r>
-            <a:endParaRPr lang="en-US" sz="4000" dirty="0"/>
-          </a:p>
-        </p:txBody>
-      </p:sp>
-      <p:sp>
-        <p:nvSpPr>
-          <p:cNvPr id="9" name="gravite-faibles-fond"/>
-          <p:cNvSpPr/>
-          <p:nvPr/>
-        </p:nvSpPr>
-        <p:spPr>
-          <a:xfrm>
-            <a:off x="4800600" y="1463040"/>
-            <a:ext cx="1280160" cy="1463040"/>
-          </a:xfrm>
-          <a:prstGeom prst="roundRect">
-            <a:avLst>
-              <a:gd name="adj" fmla="val 4286"/>
-            </a:avLst>
-          </a:prstGeom>
-          <a:solidFill>
-            <a:srgbClr val="D5DBE1"/>
-          </a:solidFill>
-          <a:ln w="12700">
-            <a:solidFill>
-              <a:srgbClr val="D5DBE1"/>
-            </a:solidFill>
-            <a:prstDash val="solid"/>
-          </a:ln>
-        </p:spPr>
-      </p:sp>
-      <p:sp>
-        <p:nvSpPr>
-          <p:cNvPr id="10" name="gravite-faibles"/>
-          <p:cNvSpPr txBox="1"/>
-          <p:nvPr/>
-        </p:nvSpPr>
-        <p:spPr>
-          <a:xfrm>
-            <a:off x="4800600" y="1463040"/>
-            <a:ext cx="1280160" cy="1463040"/>
-          </a:xfrm>
-          <a:prstGeom prst="rect">
-            <a:avLst/>
-          </a:prstGeom>
-          <a:noFill/>
-          <a:ln/>
-        </p:spPr>
-        <p:txBody>
-          <a:bodyPr wrap="square" lIns="0" tIns="0" rIns="0" bIns="0" rtlCol="0" anchor="ctr"/>
-          <a:lstStyle/>
-          <a:p>
-            <a:pPr algn="ctr" indent="0" marL="0">
-              <a:buNone/>
-            </a:pPr>
-            <a:r>
-              <a:rPr lang="en-US" sz="4000" b="1" dirty="0">
-                <a:solidFill>
-                  <a:schemeClr val="tx1"/>
-                </a:solidFill>
-              </a:rPr>
-              <a:t>2</a:t>
-            </a:r>
-            <a:endParaRPr lang="en-US" sz="4000" dirty="0"/>
-          </a:p>
-          <a:p>
-            <a:pPr algn="ctr" indent="0" marL="0">
-              <a:buNone/>
-            </a:pPr>
-            <a:r>
-              <a:rPr lang="en-US" sz="1300" dirty="0">
-                <a:solidFill>
-                  <a:schemeClr val="tx1"/>
-                </a:solidFill>
-              </a:rPr>
-              <a:t>faibles</a:t>
-            </a:r>
-            <a:endParaRPr lang="en-US" sz="4000" dirty="0"/>
-          </a:p>
-        </p:txBody>
-      </p:sp>
-      <p:sp>
-        <p:nvSpPr>
-          <p:cNvPr id="11" name="resume-audit"/>
-          <p:cNvSpPr txBox="1"/>
-          <p:nvPr/>
-        </p:nvSpPr>
-        <p:spPr>
-          <a:xfrm>
-            <a:off x="548640" y="3154680"/>
-            <a:ext cx="5577840" cy="1737360"/>
-          </a:xfrm>
-          <a:prstGeom prst="rect">
-            <a:avLst/>
-          </a:prstGeom>
-          <a:noFill/>
-          <a:ln/>
-        </p:spPr>
-        <p:txBody>
-          <a:bodyPr wrap="square" lIns="0" tIns="0" rIns="0" bIns="0" rtlCol="0" anchor="t"/>
-          <a:lstStyle/>
-          <a:p>
-            <a:pPr indent="0" marL="0">
-              <a:spcAft>
-                <a:spcPts val="600"/>
-              </a:spcAft>
-              <a:buNone/>
-            </a:pPr>
-            <a:r>
-              <a:rPr lang="en-US" sz="1600" b="1" dirty="0">
-                <a:solidFill>
-                  <a:schemeClr val="tx1"/>
-                </a:solidFill>
-              </a:rPr>
-              <a:t>11 constats avant le pentest</a:t>
-            </a:r>
-            <a:endParaRPr lang="en-US" sz="1600" dirty="0"/>
-          </a:p>
-          <a:p>
-            <a:pPr indent="0" marL="0">
-              <a:spcAft>
-                <a:spcPts val="600"/>
-              </a:spcAft>
-              <a:buNone/>
-            </a:pPr>
-            <a:r>
-              <a:rPr lang="en-US" sz="1400" dirty="0">
-                <a:solidFill>
-                  <a:schemeClr val="tx2"/>
-                </a:solidFill>
-              </a:rPr>
-              <a:t>Revue de code de toutes les briques, recherche de secrets, revue des ports et du TLS.</a:t>
-            </a:r>
-            <a:endParaRPr lang="en-US" sz="1600" dirty="0"/>
-          </a:p>
-          <a:p>
-            <a:pPr indent="0" marL="0">
-              <a:spcAft>
-                <a:spcPts val="600"/>
-              </a:spcAft>
-              <a:buNone/>
-            </a:pPr>
-            <a:r>
-              <a:rPr lang="en-US" sz="1400" b="1" dirty="0">
-                <a:solidFill>
-                  <a:schemeClr val="accent3"/>
-                </a:solidFill>
-              </a:rPr>
-              <a:t>Déjà corrigé : </a:t>
-            </a:r>
-            <a:pPr indent="0" marL="0">
-              <a:spcAft>
-                <a:spcPts val="600"/>
-              </a:spcAft>
-              <a:buNone/>
-            </a:pPr>
-            <a:r>
-              <a:rPr lang="en-US" sz="1400" dirty="0">
-                <a:solidFill>
-                  <a:schemeClr val="tx1"/>
-                </a:solidFill>
-              </a:rPr>
-              <a:t>tous les secrets retirés du dépôt.</a:t>
-            </a:r>
-            <a:endParaRPr lang="en-US" sz="1600" dirty="0"/>
-          </a:p>
-        </p:txBody>
-      </p:sp>
-      <p:sp>
-        <p:nvSpPr>
-          <p:cNvPr id="12" name="pentest-fond"/>
-          <p:cNvSpPr/>
-          <p:nvPr/>
-        </p:nvSpPr>
-        <p:spPr>
-          <a:xfrm>
-            <a:off x="6492240" y="1463040"/>
-            <a:ext cx="5120640" cy="4160520"/>
-          </a:xfrm>
-          <a:prstGeom prst="roundRect">
-            <a:avLst>
-              <a:gd name="adj" fmla="val 1319"/>
+              <a:gd name="adj" fmla="val 4444"/>
             </a:avLst>
           </a:prstGeom>
           <a:solidFill>
@@ -5646,7 +5251,378 @@
       </p:sp>
       <p:sp>
         <p:nvSpPr>
-          <p:cNvPr id="13" name="pentest-resultats"/>
+          <p:cNvPr id="4" name="stat-correctifs-texte"/>
+          <p:cNvSpPr txBox="1"/>
+          <p:nvPr/>
+        </p:nvSpPr>
+        <p:spPr>
+          <a:xfrm>
+            <a:off x="731520" y="1572768"/>
+            <a:ext cx="5212080" cy="1014984"/>
+          </a:xfrm>
+          <a:prstGeom prst="rect">
+            <a:avLst/>
+          </a:prstGeom>
+          <a:noFill/>
+          <a:ln/>
+        </p:spPr>
+        <p:txBody>
+          <a:bodyPr wrap="square" lIns="0" tIns="0" rIns="0" bIns="0" rtlCol="0" anchor="t"/>
+          <a:lstStyle/>
+          <a:p>
+            <a:pPr indent="0" marL="0">
+              <a:spcAft>
+                <a:spcPts val="400"/>
+              </a:spcAft>
+              <a:buNone/>
+            </a:pPr>
+            <a:r>
+              <a:rPr lang="en-US" sz="3600" b="1" dirty="0">
+                <a:solidFill>
+                  <a:schemeClr val="accent1"/>
+                </a:solidFill>
+              </a:rPr>
+              <a:t>5 correctifs</a:t>
+            </a:r>
+            <a:endParaRPr lang="en-US" sz="3600" dirty="0"/>
+          </a:p>
+          <a:p>
+            <a:pPr indent="0" marL="0">
+              <a:spcAft>
+                <a:spcPts val="400"/>
+              </a:spcAft>
+              <a:buNone/>
+            </a:pPr>
+            <a:r>
+              <a:rPr lang="en-US" sz="1300" dirty="0">
+                <a:solidFill>
+                  <a:schemeClr val="bg2"/>
+                </a:solidFill>
+              </a:rPr>
+              <a:t>appliqués avant le pentest, après revue de toutes les briques</a:t>
+            </a:r>
+            <a:endParaRPr lang="en-US" sz="3600" dirty="0"/>
+          </a:p>
+        </p:txBody>
+      </p:sp>
+      <p:sp>
+        <p:nvSpPr>
+          <p:cNvPr id="5" name="correctif-1-puce"/>
+          <p:cNvSpPr/>
+          <p:nvPr/>
+        </p:nvSpPr>
+        <p:spPr>
+          <a:xfrm>
+            <a:off x="548640" y="2999232"/>
+            <a:ext cx="274320" cy="274320"/>
+          </a:xfrm>
+          <a:prstGeom prst="ellipse">
+            <a:avLst/>
+          </a:prstGeom>
+          <a:solidFill>
+            <a:schemeClr val="accent3"/>
+          </a:solidFill>
+          <a:ln w="12700">
+            <a:solidFill>
+              <a:schemeClr val="accent3"/>
+            </a:solidFill>
+            <a:prstDash val="solid"/>
+          </a:ln>
+        </p:spPr>
+      </p:sp>
+      <p:sp>
+        <p:nvSpPr>
+          <p:cNvPr id="6" name="correctif-1"/>
+          <p:cNvSpPr txBox="1"/>
+          <p:nvPr/>
+        </p:nvSpPr>
+        <p:spPr>
+          <a:xfrm>
+            <a:off x="1005840" y="2926080"/>
+            <a:ext cx="5120640" cy="457200"/>
+          </a:xfrm>
+          <a:prstGeom prst="rect">
+            <a:avLst/>
+          </a:prstGeom>
+          <a:noFill/>
+          <a:ln/>
+        </p:spPr>
+        <p:txBody>
+          <a:bodyPr wrap="square" lIns="0" tIns="0" rIns="0" bIns="0" rtlCol="0" anchor="ctr"/>
+          <a:lstStyle/>
+          <a:p>
+            <a:pPr indent="0" marL="0">
+              <a:buNone/>
+            </a:pPr>
+            <a:r>
+              <a:rPr lang="en-US" sz="1400" b="1" dirty="0">
+                <a:solidFill>
+                  <a:schemeClr val="tx1"/>
+                </a:solidFill>
+              </a:rPr>
+              <a:t>MQTT exclusivement sur TLS : </a:t>
+            </a:r>
+            <a:pPr indent="0" marL="0">
+              <a:buNone/>
+            </a:pPr>
+            <a:r>
+              <a:rPr lang="en-US" sz="1400" dirty="0">
+                <a:solidFill>
+                  <a:schemeClr val="tx2"/>
+                </a:solidFill>
+              </a:rPr>
+              <a:t>le boîtier ne parle plus jamais en clair</a:t>
+            </a:r>
+            <a:endParaRPr lang="en-US" sz="1400" dirty="0"/>
+          </a:p>
+        </p:txBody>
+      </p:sp>
+      <p:sp>
+        <p:nvSpPr>
+          <p:cNvPr id="7" name="correctif-2-puce"/>
+          <p:cNvSpPr/>
+          <p:nvPr/>
+        </p:nvSpPr>
+        <p:spPr>
+          <a:xfrm>
+            <a:off x="548640" y="3685032"/>
+            <a:ext cx="274320" cy="274320"/>
+          </a:xfrm>
+          <a:prstGeom prst="ellipse">
+            <a:avLst/>
+          </a:prstGeom>
+          <a:solidFill>
+            <a:schemeClr val="accent3"/>
+          </a:solidFill>
+          <a:ln w="12700">
+            <a:solidFill>
+              <a:schemeClr val="accent3"/>
+            </a:solidFill>
+            <a:prstDash val="solid"/>
+          </a:ln>
+        </p:spPr>
+      </p:sp>
+      <p:sp>
+        <p:nvSpPr>
+          <p:cNvPr id="8" name="correctif-2"/>
+          <p:cNvSpPr txBox="1"/>
+          <p:nvPr/>
+        </p:nvSpPr>
+        <p:spPr>
+          <a:xfrm>
+            <a:off x="1005840" y="3611880"/>
+            <a:ext cx="5120640" cy="457200"/>
+          </a:xfrm>
+          <a:prstGeom prst="rect">
+            <a:avLst/>
+          </a:prstGeom>
+          <a:noFill/>
+          <a:ln/>
+        </p:spPr>
+        <p:txBody>
+          <a:bodyPr wrap="square" lIns="0" tIns="0" rIns="0" bIns="0" rtlCol="0" anchor="ctr"/>
+          <a:lstStyle/>
+          <a:p>
+            <a:pPr indent="0" marL="0">
+              <a:buNone/>
+            </a:pPr>
+            <a:r>
+              <a:rPr lang="en-US" sz="1400" b="1" dirty="0">
+                <a:solidFill>
+                  <a:schemeClr val="tx1"/>
+                </a:solidFill>
+              </a:rPr>
+              <a:t>Secrets hors du dépôt : </a:t>
+            </a:r>
+            <a:pPr indent="0" marL="0">
+              <a:buNone/>
+            </a:pPr>
+            <a:r>
+              <a:rPr lang="en-US" sz="1400" dirty="0">
+                <a:solidFill>
+                  <a:schemeClr val="tx2"/>
+                </a:solidFill>
+              </a:rPr>
+              <a:t>.env, secrets.h, vault.yml exclus, modèles fournis</a:t>
+            </a:r>
+            <a:endParaRPr lang="en-US" sz="1400" dirty="0"/>
+          </a:p>
+        </p:txBody>
+      </p:sp>
+      <p:sp>
+        <p:nvSpPr>
+          <p:cNvPr id="9" name="correctif-3-puce"/>
+          <p:cNvSpPr/>
+          <p:nvPr/>
+        </p:nvSpPr>
+        <p:spPr>
+          <a:xfrm>
+            <a:off x="548640" y="4370832"/>
+            <a:ext cx="274320" cy="274320"/>
+          </a:xfrm>
+          <a:prstGeom prst="ellipse">
+            <a:avLst/>
+          </a:prstGeom>
+          <a:solidFill>
+            <a:schemeClr val="accent3"/>
+          </a:solidFill>
+          <a:ln w="12700">
+            <a:solidFill>
+              <a:schemeClr val="accent3"/>
+            </a:solidFill>
+            <a:prstDash val="solid"/>
+          </a:ln>
+        </p:spPr>
+      </p:sp>
+      <p:sp>
+        <p:nvSpPr>
+          <p:cNvPr id="10" name="correctif-3"/>
+          <p:cNvSpPr txBox="1"/>
+          <p:nvPr/>
+        </p:nvSpPr>
+        <p:spPr>
+          <a:xfrm>
+            <a:off x="1005840" y="4297680"/>
+            <a:ext cx="5120640" cy="457200"/>
+          </a:xfrm>
+          <a:prstGeom prst="rect">
+            <a:avLst/>
+          </a:prstGeom>
+          <a:noFill/>
+          <a:ln/>
+        </p:spPr>
+        <p:txBody>
+          <a:bodyPr wrap="square" lIns="0" tIns="0" rIns="0" bIns="0" rtlCol="0" anchor="ctr"/>
+          <a:lstStyle/>
+          <a:p>
+            <a:pPr indent="0" marL="0">
+              <a:buNone/>
+            </a:pPr>
+            <a:r>
+              <a:rPr lang="en-US" sz="1400" b="1" dirty="0">
+                <a:solidFill>
+                  <a:schemeClr val="tx1"/>
+                </a:solidFill>
+              </a:rPr>
+              <a:t>Clés obligatoires : </a:t>
+            </a:r>
+            <a:pPr indent="0" marL="0">
+              <a:buNone/>
+            </a:pPr>
+            <a:r>
+              <a:rPr lang="en-US" sz="1400" dirty="0">
+                <a:solidFill>
+                  <a:schemeClr val="tx2"/>
+                </a:solidFill>
+              </a:rPr>
+              <a:t>robot et API refusent de démarrer sans secret</a:t>
+            </a:r>
+            <a:endParaRPr lang="en-US" sz="1400" dirty="0"/>
+          </a:p>
+        </p:txBody>
+      </p:sp>
+      <p:sp>
+        <p:nvSpPr>
+          <p:cNvPr id="11" name="correctif-4-puce"/>
+          <p:cNvSpPr/>
+          <p:nvPr/>
+        </p:nvSpPr>
+        <p:spPr>
+          <a:xfrm>
+            <a:off x="548640" y="5056632"/>
+            <a:ext cx="274320" cy="274320"/>
+          </a:xfrm>
+          <a:prstGeom prst="ellipse">
+            <a:avLst/>
+          </a:prstGeom>
+          <a:solidFill>
+            <a:schemeClr val="accent3"/>
+          </a:solidFill>
+          <a:ln w="12700">
+            <a:solidFill>
+              <a:schemeClr val="accent3"/>
+            </a:solidFill>
+            <a:prstDash val="solid"/>
+          </a:ln>
+        </p:spPr>
+      </p:sp>
+      <p:sp>
+        <p:nvSpPr>
+          <p:cNvPr id="12" name="correctif-4"/>
+          <p:cNvSpPr txBox="1"/>
+          <p:nvPr/>
+        </p:nvSpPr>
+        <p:spPr>
+          <a:xfrm>
+            <a:off x="1005840" y="4983480"/>
+            <a:ext cx="5120640" cy="457200"/>
+          </a:xfrm>
+          <a:prstGeom prst="rect">
+            <a:avLst/>
+          </a:prstGeom>
+          <a:noFill/>
+          <a:ln/>
+        </p:spPr>
+        <p:txBody>
+          <a:bodyPr wrap="square" lIns="0" tIns="0" rIns="0" bIns="0" rtlCol="0" anchor="ctr"/>
+          <a:lstStyle/>
+          <a:p>
+            <a:pPr indent="0" marL="0">
+              <a:buNone/>
+            </a:pPr>
+            <a:r>
+              <a:rPr lang="en-US" sz="1400" b="1" dirty="0">
+                <a:solidFill>
+                  <a:schemeClr val="tx1"/>
+                </a:solidFill>
+              </a:rPr>
+              <a:t>Flux annoté au dashboard : </a:t>
+            </a:r>
+            <a:pPr indent="0" marL="0">
+              <a:buNone/>
+            </a:pPr>
+            <a:r>
+              <a:rPr lang="en-US" sz="1400" dirty="0">
+                <a:solidFill>
+                  <a:schemeClr val="tx2"/>
+                </a:solidFill>
+              </a:rPr>
+              <a:t>l'API relaie le flux YOLO, robot en repli</a:t>
+            </a:r>
+            <a:endParaRPr lang="en-US" sz="1400" dirty="0"/>
+          </a:p>
+        </p:txBody>
+      </p:sp>
+      <p:sp>
+        <p:nvSpPr>
+          <p:cNvPr id="13" name="pentest-fond"/>
+          <p:cNvSpPr/>
+          <p:nvPr/>
+        </p:nvSpPr>
+        <p:spPr>
+          <a:xfrm>
+            <a:off x="6492240" y="1463040"/>
+            <a:ext cx="5120640" cy="4160520"/>
+          </a:xfrm>
+          <a:prstGeom prst="roundRect">
+            <a:avLst>
+              <a:gd name="adj" fmla="val 1319"/>
+            </a:avLst>
+          </a:prstGeom>
+          <a:solidFill>
+            <a:schemeClr val="tx1"/>
+          </a:solidFill>
+          <a:ln w="12700">
+            <a:solidFill>
+              <a:schemeClr val="tx1"/>
+            </a:solidFill>
+            <a:prstDash val="solid"/>
+          </a:ln>
+        </p:spPr>
+      </p:sp>
+      <p:sp>
+        <p:nvSpPr>
+          <p:cNvPr id="14" name="pentest-resultats"/>
           <p:cNvSpPr txBox="1"/>
           <p:nvPr/>
         </p:nvSpPr>
@@ -6767,7 +6743,7 @@
       </p:sp>
       <p:pic>
         <p:nvPicPr>
-          <p:cNvPr id="5" name="logo-bouclier-fin" descr="/private/tmp/claude-501/-Users-felis-Documents-PlatformIO-Projects-sentinel-x-firmware/bdfa7dd2-0ce6-4394-ba43-ca98c8a92cd5/scratchpad/build/shield.png">    </p:cNvPr>
+          <p:cNvPr id="5" name="logo-bouclier-fin" descr="/Users/felis/Documents/Workspace/Ecole/Master/Workshop-2026/Sentinel-X-Yanshee-defender-3000/livrables/sources/pptx/shield.png">    </p:cNvPr>
           <p:cNvPicPr>
             <a:picLocks noChangeAspect="1"/>
           </p:cNvPicPr>
@@ -12136,7 +12112,7 @@
       </p:sp>
       <p:pic>
         <p:nvPicPr>
-          <p:cNvPr id="3" name="graphique-scenario" descr="/private/tmp/claude-501/-Users-felis-Documents-PlatformIO-Projects-sentinel-x-firmware/bdfa7dd2-0ce6-4394-ba43-ca98c8a92cd5/scratchpad/build/scenario_demo_ia.png">    </p:cNvPr>
+          <p:cNvPr id="3" name="graphique-scenario" descr="/Users/felis/Documents/Workspace/Ecole/Master/Workshop-2026/Sentinel-X-Yanshee-defender-3000/livrables/sources/pptx/scenario_demo_ia.png">    </p:cNvPr>
           <p:cNvPicPr>
             <a:picLocks noChangeAspect="1"/>
           </p:cNvPicPr>
